--- a/Capstone2_Presentation.pptx
+++ b/Capstone2_Presentation.pptx
@@ -13,13 +13,14 @@
     <p:sldId id="269" r:id="rId7"/>
     <p:sldId id="264" r:id="rId8"/>
     <p:sldId id="270" r:id="rId9"/>
-    <p:sldId id="265" r:id="rId10"/>
-    <p:sldId id="271" r:id="rId11"/>
-    <p:sldId id="266" r:id="rId12"/>
-    <p:sldId id="267" r:id="rId13"/>
-    <p:sldId id="268" r:id="rId14"/>
-    <p:sldId id="272" r:id="rId15"/>
-    <p:sldId id="273" r:id="rId16"/>
+    <p:sldId id="274" r:id="rId10"/>
+    <p:sldId id="265" r:id="rId11"/>
+    <p:sldId id="271" r:id="rId12"/>
+    <p:sldId id="266" r:id="rId13"/>
+    <p:sldId id="267" r:id="rId14"/>
+    <p:sldId id="268" r:id="rId15"/>
+    <p:sldId id="272" r:id="rId16"/>
+    <p:sldId id="273" r:id="rId17"/>
   </p:sldIdLst>
   <p:sldSz cx="9144000" cy="6858000" type="screen4x3"/>
   <p:notesSz cx="6858000" cy="9144000"/>
@@ -393,7 +394,7 @@
             <a:fld id="{F8CFA630-13BB-46C4-BD44-B2C5F9B66074}" type="datetimeFigureOut">
               <a:rPr lang="en-US" smtClean="0"/>
               <a:pPr eaLnBrk="1" latinLnBrk="0" hangingPunct="1"/>
-              <a:t>2/2/2026</a:t>
+              <a:t>3/7/2026</a:t>
             </a:fld>
             <a:endParaRPr lang="en-US" dirty="0">
               <a:solidFill>
@@ -607,7 +608,7 @@
             <a:fld id="{F8CFA630-13BB-46C4-BD44-B2C5F9B66074}" type="datetimeFigureOut">
               <a:rPr lang="en-US" smtClean="0"/>
               <a:pPr eaLnBrk="1" latinLnBrk="0" hangingPunct="1"/>
-              <a:t>2/2/2026</a:t>
+              <a:t>3/7/2026</a:t>
             </a:fld>
             <a:endParaRPr lang="en-US"/>
           </a:p>
@@ -800,7 +801,7 @@
             <a:fld id="{F8CFA630-13BB-46C4-BD44-B2C5F9B66074}" type="datetimeFigureOut">
               <a:rPr lang="en-US" smtClean="0"/>
               <a:pPr eaLnBrk="1" latinLnBrk="0" hangingPunct="1"/>
-              <a:t>2/2/2026</a:t>
+              <a:t>3/7/2026</a:t>
             </a:fld>
             <a:endParaRPr lang="en-US" dirty="0"/>
           </a:p>
@@ -999,7 +1000,7 @@
             <a:fld id="{F8CFA630-13BB-46C4-BD44-B2C5F9B66074}" type="datetimeFigureOut">
               <a:rPr lang="en-US" smtClean="0"/>
               <a:pPr eaLnBrk="1" latinLnBrk="0" hangingPunct="1"/>
-              <a:t>2/2/2026</a:t>
+              <a:t>3/7/2026</a:t>
             </a:fld>
             <a:endParaRPr lang="en-US"/>
           </a:p>
@@ -1228,7 +1229,7 @@
             <a:fld id="{F8CFA630-13BB-46C4-BD44-B2C5F9B66074}" type="datetimeFigureOut">
               <a:rPr lang="en-US" smtClean="0"/>
               <a:pPr eaLnBrk="1" latinLnBrk="0" hangingPunct="1"/>
-              <a:t>2/2/2026</a:t>
+              <a:t>3/7/2026</a:t>
             </a:fld>
             <a:endParaRPr lang="en-US">
               <a:solidFill>
@@ -1530,7 +1531,7 @@
             <a:fld id="{F8CFA630-13BB-46C4-BD44-B2C5F9B66074}" type="datetimeFigureOut">
               <a:rPr lang="en-US" smtClean="0"/>
               <a:pPr eaLnBrk="1" latinLnBrk="0" hangingPunct="1"/>
-              <a:t>2/2/2026</a:t>
+              <a:t>3/7/2026</a:t>
             </a:fld>
             <a:endParaRPr lang="en-US"/>
           </a:p>
@@ -1964,7 +1965,7 @@
             <a:fld id="{F8CFA630-13BB-46C4-BD44-B2C5F9B66074}" type="datetimeFigureOut">
               <a:rPr lang="en-US" smtClean="0"/>
               <a:pPr eaLnBrk="1" latinLnBrk="0" hangingPunct="1"/>
-              <a:t>2/2/2026</a:t>
+              <a:t>3/7/2026</a:t>
             </a:fld>
             <a:endParaRPr lang="en-US"/>
           </a:p>
@@ -2093,7 +2094,7 @@
             <a:fld id="{F8CFA630-13BB-46C4-BD44-B2C5F9B66074}" type="datetimeFigureOut">
               <a:rPr lang="en-US" smtClean="0"/>
               <a:pPr eaLnBrk="1" latinLnBrk="0" hangingPunct="1"/>
-              <a:t>2/2/2026</a:t>
+              <a:t>3/7/2026</a:t>
             </a:fld>
             <a:endParaRPr lang="en-US"/>
           </a:p>
@@ -2199,7 +2200,7 @@
             <a:fld id="{F8CFA630-13BB-46C4-BD44-B2C5F9B66074}" type="datetimeFigureOut">
               <a:rPr lang="en-US" smtClean="0"/>
               <a:pPr eaLnBrk="1" latinLnBrk="0" hangingPunct="1"/>
-              <a:t>2/2/2026</a:t>
+              <a:t>3/7/2026</a:t>
             </a:fld>
             <a:endParaRPr lang="en-US" dirty="0">
               <a:solidFill>
@@ -2479,7 +2480,7 @@
             <a:fld id="{F8CFA630-13BB-46C4-BD44-B2C5F9B66074}" type="datetimeFigureOut">
               <a:rPr lang="en-US" smtClean="0"/>
               <a:pPr eaLnBrk="1" latinLnBrk="0" hangingPunct="1"/>
-              <a:t>2/2/2026</a:t>
+              <a:t>3/7/2026</a:t>
             </a:fld>
             <a:endParaRPr lang="en-US"/>
           </a:p>
@@ -2846,7 +2847,7 @@
             <a:fld id="{F8CFA630-13BB-46C4-BD44-B2C5F9B66074}" type="datetimeFigureOut">
               <a:rPr lang="en-US" smtClean="0"/>
               <a:pPr eaLnBrk="1" latinLnBrk="0" hangingPunct="1"/>
-              <a:t>2/2/2026</a:t>
+              <a:t>3/7/2026</a:t>
             </a:fld>
             <a:endParaRPr lang="en-US"/>
           </a:p>
@@ -3204,7 +3205,7 @@
             <a:fld id="{F8CFA630-13BB-46C4-BD44-B2C5F9B66074}" type="datetimeFigureOut">
               <a:rPr lang="en-US" smtClean="0"/>
               <a:pPr eaLnBrk="1" latinLnBrk="0" hangingPunct="1"/>
-              <a:t>2/2/2026</a:t>
+              <a:t>3/7/2026</a:t>
             </a:fld>
             <a:endParaRPr lang="en-US" sz="1000" dirty="0">
               <a:solidFill>
@@ -3803,6 +3804,183 @@
         </p:nvSpPr>
         <p:spPr/>
         <p:txBody>
+          <a:bodyPr>
+            <a:normAutofit/>
+          </a:bodyPr>
+          <a:lstStyle/>
+          <a:p>
+            <a:r>
+              <a:rPr lang="en-CA" sz="3200" dirty="0" smtClean="0"/>
+              <a:t>BEST MODEL</a:t>
+            </a:r>
+            <a:endParaRPr lang="en-CA" sz="3200" dirty="0"/>
+          </a:p>
+        </p:txBody>
+      </p:sp>
+      <p:sp>
+        <p:nvSpPr>
+          <p:cNvPr id="3" name="Content Placeholder 2"/>
+          <p:cNvSpPr>
+            <a:spLocks noGrp="1"/>
+          </p:cNvSpPr>
+          <p:nvPr>
+            <p:ph idx="1"/>
+          </p:nvPr>
+        </p:nvSpPr>
+        <p:spPr/>
+        <p:txBody>
+          <a:bodyPr/>
+          <a:lstStyle/>
+          <a:p>
+            <a:pPr marL="0" indent="0">
+              <a:buNone/>
+            </a:pPr>
+            <a:r>
+              <a:rPr lang="en-US" b="1" dirty="0"/>
+              <a:t>Gradient Boosting Classifier</a:t>
+            </a:r>
+          </a:p>
+          <a:p>
+            <a:endParaRPr lang="en-US" dirty="0"/>
+          </a:p>
+          <a:p>
+            <a:r>
+              <a:rPr lang="en-US" dirty="0"/>
+              <a:t>Best balance between majority and minority classes</a:t>
+            </a:r>
+          </a:p>
+          <a:p>
+            <a:r>
+              <a:rPr lang="en-US" dirty="0"/>
+              <a:t>Strong generalization on test data</a:t>
+            </a:r>
+          </a:p>
+          <a:p>
+            <a:r>
+              <a:rPr lang="en-US" dirty="0"/>
+              <a:t>Stable cross-validation </a:t>
+            </a:r>
+            <a:r>
+              <a:rPr lang="en-US" dirty="0" smtClean="0"/>
+              <a:t>performance</a:t>
+            </a:r>
+          </a:p>
+          <a:p>
+            <a:r>
+              <a:rPr lang="en-CA" dirty="0"/>
+              <a:t>Best GB </a:t>
+            </a:r>
+            <a:r>
+              <a:rPr lang="en-CA" dirty="0" err="1"/>
+              <a:t>params</a:t>
+            </a:r>
+            <a:r>
+              <a:rPr lang="en-CA" dirty="0"/>
+              <a:t>: {'subsample': 0.8, '</a:t>
+            </a:r>
+            <a:r>
+              <a:rPr lang="en-CA" dirty="0" err="1"/>
+              <a:t>n_estimators</a:t>
+            </a:r>
+            <a:r>
+              <a:rPr lang="en-CA" dirty="0"/>
+              <a:t>': 200, '</a:t>
+            </a:r>
+            <a:r>
+              <a:rPr lang="en-CA" dirty="0" err="1"/>
+              <a:t>min_samples_split</a:t>
+            </a:r>
+            <a:r>
+              <a:rPr lang="en-CA" dirty="0"/>
+              <a:t>': 5, '</a:t>
+            </a:r>
+            <a:r>
+              <a:rPr lang="en-CA" dirty="0" err="1"/>
+              <a:t>min_samples_leaf</a:t>
+            </a:r>
+            <a:r>
+              <a:rPr lang="en-CA" dirty="0"/>
+              <a:t>': 5, '</a:t>
+            </a:r>
+            <a:r>
+              <a:rPr lang="en-CA" dirty="0" err="1"/>
+              <a:t>max_features</a:t>
+            </a:r>
+            <a:r>
+              <a:rPr lang="en-CA" dirty="0"/>
+              <a:t>': None, '</a:t>
+            </a:r>
+            <a:r>
+              <a:rPr lang="en-CA" dirty="0" err="1"/>
+              <a:t>max_depth</a:t>
+            </a:r>
+            <a:r>
+              <a:rPr lang="en-CA" dirty="0"/>
+              <a:t>': 5, '</a:t>
+            </a:r>
+            <a:r>
+              <a:rPr lang="en-CA" dirty="0" err="1"/>
+              <a:t>learning_rate</a:t>
+            </a:r>
+            <a:r>
+              <a:rPr lang="en-CA" dirty="0"/>
+              <a:t>': 0.1}</a:t>
+            </a:r>
+          </a:p>
+          <a:p>
+            <a:endParaRPr lang="en-CA" dirty="0"/>
+          </a:p>
+        </p:txBody>
+      </p:sp>
+    </p:spTree>
+    <p:extLst>
+      <p:ext uri="{BB962C8B-B14F-4D97-AF65-F5344CB8AC3E}">
+        <p14:creationId xmlns:p14="http://schemas.microsoft.com/office/powerpoint/2010/main" val="1776460486"/>
+      </p:ext>
+    </p:extLst>
+  </p:cSld>
+  <p:clrMapOvr>
+    <a:masterClrMapping/>
+  </p:clrMapOvr>
+  <p:timing>
+    <p:tnLst>
+      <p:par>
+        <p:cTn id="1" dur="indefinite" restart="never" nodeType="tmRoot"/>
+      </p:par>
+    </p:tnLst>
+  </p:timing>
+</p:sld>
+</file>
+
+<file path=ppt/slides/slide11.xml><?xml version="1.0" encoding="utf-8"?>
+<p:sld xmlns:a="http://schemas.openxmlformats.org/drawingml/2006/main" xmlns:r="http://schemas.openxmlformats.org/officeDocument/2006/relationships" xmlns:p="http://schemas.openxmlformats.org/presentationml/2006/main">
+  <p:cSld>
+    <p:spTree>
+      <p:nvGrpSpPr>
+        <p:cNvPr id="1" name=""/>
+        <p:cNvGrpSpPr/>
+        <p:nvPr/>
+      </p:nvGrpSpPr>
+      <p:grpSpPr>
+        <a:xfrm>
+          <a:off x="0" y="0"/>
+          <a:ext cx="0" cy="0"/>
+          <a:chOff x="0" y="0"/>
+          <a:chExt cx="0" cy="0"/>
+        </a:xfrm>
+      </p:grpSpPr>
+      <p:sp>
+        <p:nvSpPr>
+          <p:cNvPr id="2" name="Title 1"/>
+          <p:cNvSpPr>
+            <a:spLocks noGrp="1"/>
+          </p:cNvSpPr>
+          <p:nvPr>
+            <p:ph type="title"/>
+          </p:nvPr>
+        </p:nvSpPr>
+        <p:spPr/>
+        <p:txBody>
           <a:bodyPr/>
           <a:lstStyle/>
           <a:p>
@@ -3888,103 +4066,6 @@
 </p:sld>
 </file>
 
-<file path=ppt/slides/slide11.xml><?xml version="1.0" encoding="utf-8"?>
-<p:sld xmlns:a="http://schemas.openxmlformats.org/drawingml/2006/main" xmlns:r="http://schemas.openxmlformats.org/officeDocument/2006/relationships" xmlns:p="http://schemas.openxmlformats.org/presentationml/2006/main">
-  <p:cSld>
-    <p:spTree>
-      <p:nvGrpSpPr>
-        <p:cNvPr id="1" name=""/>
-        <p:cNvGrpSpPr/>
-        <p:nvPr/>
-      </p:nvGrpSpPr>
-      <p:grpSpPr>
-        <a:xfrm>
-          <a:off x="0" y="0"/>
-          <a:ext cx="0" cy="0"/>
-          <a:chOff x="0" y="0"/>
-          <a:chExt cx="0" cy="0"/>
-        </a:xfrm>
-      </p:grpSpPr>
-      <p:sp>
-        <p:nvSpPr>
-          <p:cNvPr id="2" name="Title 1"/>
-          <p:cNvSpPr>
-            <a:spLocks noGrp="1"/>
-          </p:cNvSpPr>
-          <p:nvPr>
-            <p:ph type="title"/>
-          </p:nvPr>
-        </p:nvSpPr>
-        <p:spPr/>
-        <p:txBody>
-          <a:bodyPr>
-            <a:normAutofit/>
-          </a:bodyPr>
-          <a:lstStyle/>
-          <a:p>
-            <a:r>
-              <a:rPr lang="en-CA" sz="3200" dirty="0" smtClean="0"/>
-              <a:t>RECOMMENDATIONS</a:t>
-            </a:r>
-            <a:endParaRPr lang="en-CA" sz="3200" dirty="0"/>
-          </a:p>
-        </p:txBody>
-      </p:sp>
-      <p:sp>
-        <p:nvSpPr>
-          <p:cNvPr id="3" name="Content Placeholder 2"/>
-          <p:cNvSpPr>
-            <a:spLocks noGrp="1"/>
-          </p:cNvSpPr>
-          <p:nvPr>
-            <p:ph idx="1"/>
-          </p:nvPr>
-        </p:nvSpPr>
-        <p:spPr/>
-        <p:txBody>
-          <a:bodyPr/>
-          <a:lstStyle/>
-          <a:p>
-            <a:r>
-              <a:rPr lang="en-US" dirty="0"/>
-              <a:t>Enables instant credit approval decisions</a:t>
-            </a:r>
-          </a:p>
-          <a:p>
-            <a:r>
-              <a:rPr lang="en-US" dirty="0"/>
-              <a:t>Improves business efficiency</a:t>
-            </a:r>
-          </a:p>
-          <a:p>
-            <a:r>
-              <a:rPr lang="en-US" dirty="0"/>
-              <a:t>Reduces financial risk by identifying ineligible applicants</a:t>
-            </a:r>
-            <a:endParaRPr lang="en-CA" dirty="0"/>
-          </a:p>
-        </p:txBody>
-      </p:sp>
-    </p:spTree>
-    <p:extLst>
-      <p:ext uri="{BB962C8B-B14F-4D97-AF65-F5344CB8AC3E}">
-        <p14:creationId xmlns:p14="http://schemas.microsoft.com/office/powerpoint/2010/main" val="2156644220"/>
-      </p:ext>
-    </p:extLst>
-  </p:cSld>
-  <p:clrMapOvr>
-    <a:masterClrMapping/>
-  </p:clrMapOvr>
-  <p:timing>
-    <p:tnLst>
-      <p:par>
-        <p:cTn id="1" dur="indefinite" restart="never" nodeType="tmRoot"/>
-      </p:par>
-    </p:tnLst>
-  </p:timing>
-</p:sld>
-</file>
-
 <file path=ppt/slides/slide12.xml><?xml version="1.0" encoding="utf-8"?>
 <p:sld xmlns:a="http://schemas.openxmlformats.org/drawingml/2006/main" xmlns:r="http://schemas.openxmlformats.org/officeDocument/2006/relationships" xmlns:p="http://schemas.openxmlformats.org/presentationml/2006/main">
   <p:cSld>
@@ -4014,41 +4095,49 @@
         </p:nvSpPr>
         <p:spPr/>
         <p:txBody>
+          <a:bodyPr>
+            <a:normAutofit/>
+          </a:bodyPr>
+          <a:lstStyle/>
+          <a:p>
+            <a:r>
+              <a:rPr lang="en-CA" sz="3200" dirty="0" smtClean="0"/>
+              <a:t>RECOMMENDATIONS</a:t>
+            </a:r>
+            <a:endParaRPr lang="en-CA" sz="3200" dirty="0"/>
+          </a:p>
+        </p:txBody>
+      </p:sp>
+      <p:sp>
+        <p:nvSpPr>
+          <p:cNvPr id="3" name="Content Placeholder 2"/>
+          <p:cNvSpPr>
+            <a:spLocks noGrp="1"/>
+          </p:cNvSpPr>
+          <p:nvPr>
+            <p:ph idx="1"/>
+          </p:nvPr>
+        </p:nvSpPr>
+        <p:spPr/>
+        <p:txBody>
           <a:bodyPr/>
           <a:lstStyle/>
           <a:p>
             <a:r>
-              <a:rPr lang="en-CA" sz="3200" dirty="0" smtClean="0"/>
-              <a:t>limitations</a:t>
-            </a:r>
-            <a:endParaRPr lang="en-CA" sz="3200" dirty="0"/>
-          </a:p>
-        </p:txBody>
-      </p:sp>
-      <p:sp>
-        <p:nvSpPr>
-          <p:cNvPr id="3" name="Content Placeholder 2"/>
-          <p:cNvSpPr>
-            <a:spLocks noGrp="1"/>
-          </p:cNvSpPr>
-          <p:nvPr>
-            <p:ph idx="1"/>
-          </p:nvPr>
-        </p:nvSpPr>
-        <p:spPr/>
-        <p:txBody>
-          <a:bodyPr/>
-          <a:lstStyle/>
-          <a:p>
-            <a:r>
               <a:rPr lang="en-US" dirty="0"/>
-              <a:t>Class imbalance impacts minority-class prediction</a:t>
+              <a:t>Enables instant credit approval decisions</a:t>
             </a:r>
           </a:p>
           <a:p>
             <a:r>
               <a:rPr lang="en-US" dirty="0"/>
-              <a:t>Synthetic oversampling may not fully reflect real-world data</a:t>
+              <a:t>Improves business efficiency</a:t>
+            </a:r>
+          </a:p>
+          <a:p>
+            <a:r>
+              <a:rPr lang="en-US" dirty="0"/>
+              <a:t>Reduces financial risk by identifying ineligible applicants</a:t>
             </a:r>
             <a:endParaRPr lang="en-CA" dirty="0"/>
           </a:p>
@@ -4057,7 +4146,7 @@
     </p:spTree>
     <p:extLst>
       <p:ext uri="{BB962C8B-B14F-4D97-AF65-F5344CB8AC3E}">
-        <p14:creationId xmlns:p14="http://schemas.microsoft.com/office/powerpoint/2010/main" val="10699416"/>
+        <p14:creationId xmlns:p14="http://schemas.microsoft.com/office/powerpoint/2010/main" val="2156644220"/>
       </p:ext>
     </p:extLst>
   </p:cSld>
@@ -4103,64 +4192,41 @@
         </p:nvSpPr>
         <p:spPr/>
         <p:txBody>
-          <a:bodyPr>
-            <a:normAutofit/>
-          </a:bodyPr>
-          <a:lstStyle/>
-          <a:p>
-            <a:r>
-              <a:rPr lang="en-CA" sz="3200" dirty="0" smtClean="0"/>
-              <a:t>Future improvements</a:t>
-            </a:r>
-            <a:endParaRPr lang="en-CA" sz="3200" dirty="0"/>
-          </a:p>
-        </p:txBody>
-      </p:sp>
-      <p:sp>
-        <p:nvSpPr>
-          <p:cNvPr id="3" name="Content Placeholder 2"/>
-          <p:cNvSpPr>
-            <a:spLocks noGrp="1"/>
-          </p:cNvSpPr>
-          <p:nvPr>
-            <p:ph idx="1"/>
-          </p:nvPr>
-        </p:nvSpPr>
-        <p:spPr/>
-        <p:txBody>
           <a:bodyPr/>
           <a:lstStyle/>
           <a:p>
             <a:r>
-              <a:rPr lang="en-US" dirty="0" err="1"/>
-              <a:t>XGBoost</a:t>
-            </a:r>
+              <a:rPr lang="en-CA" sz="3200" dirty="0" smtClean="0"/>
+              <a:t>limitations</a:t>
+            </a:r>
+            <a:endParaRPr lang="en-CA" sz="3200" dirty="0"/>
+          </a:p>
+        </p:txBody>
+      </p:sp>
+      <p:sp>
+        <p:nvSpPr>
+          <p:cNvPr id="3" name="Content Placeholder 2"/>
+          <p:cNvSpPr>
+            <a:spLocks noGrp="1"/>
+          </p:cNvSpPr>
+          <p:nvPr>
+            <p:ph idx="1"/>
+          </p:nvPr>
+        </p:nvSpPr>
+        <p:spPr/>
+        <p:txBody>
+          <a:bodyPr/>
+          <a:lstStyle/>
+          <a:p>
             <a:r>
               <a:rPr lang="en-US" dirty="0"/>
-              <a:t> / </a:t>
-            </a:r>
-            <a:r>
-              <a:rPr lang="en-US" dirty="0" err="1"/>
-              <a:t>LightGBM</a:t>
-            </a:r>
-            <a:endParaRPr lang="en-US" dirty="0"/>
+              <a:t>Class imbalance impacts minority-class prediction</a:t>
+            </a:r>
           </a:p>
           <a:p>
             <a:r>
               <a:rPr lang="en-US" dirty="0"/>
-              <a:t>Cost-sensitive learning</a:t>
-            </a:r>
-          </a:p>
-          <a:p>
-            <a:r>
-              <a:rPr lang="en-US" dirty="0"/>
-              <a:t>Additional feature engineering</a:t>
-            </a:r>
-          </a:p>
-          <a:p>
-            <a:r>
-              <a:rPr lang="en-US" dirty="0"/>
-              <a:t>External data integration</a:t>
+              <a:t>Synthetic oversampling may not fully reflect real-world data</a:t>
             </a:r>
             <a:endParaRPr lang="en-CA" dirty="0"/>
           </a:p>
@@ -4169,7 +4235,7 @@
     </p:spTree>
     <p:extLst>
       <p:ext uri="{BB962C8B-B14F-4D97-AF65-F5344CB8AC3E}">
-        <p14:creationId xmlns:p14="http://schemas.microsoft.com/office/powerpoint/2010/main" val="4171097398"/>
+        <p14:creationId xmlns:p14="http://schemas.microsoft.com/office/powerpoint/2010/main" val="10699416"/>
       </p:ext>
     </p:extLst>
   </p:cSld>
@@ -4222,6 +4288,118 @@
           <a:p>
             <a:r>
               <a:rPr lang="en-CA" sz="3200" dirty="0" smtClean="0"/>
+              <a:t>Future improvements</a:t>
+            </a:r>
+            <a:endParaRPr lang="en-CA" sz="3200" dirty="0"/>
+          </a:p>
+        </p:txBody>
+      </p:sp>
+      <p:sp>
+        <p:nvSpPr>
+          <p:cNvPr id="3" name="Content Placeholder 2"/>
+          <p:cNvSpPr>
+            <a:spLocks noGrp="1"/>
+          </p:cNvSpPr>
+          <p:nvPr>
+            <p:ph idx="1"/>
+          </p:nvPr>
+        </p:nvSpPr>
+        <p:spPr/>
+        <p:txBody>
+          <a:bodyPr/>
+          <a:lstStyle/>
+          <a:p>
+            <a:r>
+              <a:rPr lang="en-US" dirty="0" err="1"/>
+              <a:t>XGBoost</a:t>
+            </a:r>
+            <a:r>
+              <a:rPr lang="en-US" dirty="0"/>
+              <a:t> / </a:t>
+            </a:r>
+            <a:r>
+              <a:rPr lang="en-US" dirty="0" err="1"/>
+              <a:t>LightGBM</a:t>
+            </a:r>
+            <a:endParaRPr lang="en-US" dirty="0"/>
+          </a:p>
+          <a:p>
+            <a:r>
+              <a:rPr lang="en-US" dirty="0"/>
+              <a:t>Cost-sensitive learning</a:t>
+            </a:r>
+          </a:p>
+          <a:p>
+            <a:r>
+              <a:rPr lang="en-US" dirty="0"/>
+              <a:t>Additional feature engineering</a:t>
+            </a:r>
+          </a:p>
+          <a:p>
+            <a:r>
+              <a:rPr lang="en-US" dirty="0"/>
+              <a:t>External data integration</a:t>
+            </a:r>
+            <a:endParaRPr lang="en-CA" dirty="0"/>
+          </a:p>
+        </p:txBody>
+      </p:sp>
+    </p:spTree>
+    <p:extLst>
+      <p:ext uri="{BB962C8B-B14F-4D97-AF65-F5344CB8AC3E}">
+        <p14:creationId xmlns:p14="http://schemas.microsoft.com/office/powerpoint/2010/main" val="4171097398"/>
+      </p:ext>
+    </p:extLst>
+  </p:cSld>
+  <p:clrMapOvr>
+    <a:masterClrMapping/>
+  </p:clrMapOvr>
+  <p:timing>
+    <p:tnLst>
+      <p:par>
+        <p:cTn id="1" dur="indefinite" restart="never" nodeType="tmRoot"/>
+      </p:par>
+    </p:tnLst>
+  </p:timing>
+</p:sld>
+</file>
+
+<file path=ppt/slides/slide15.xml><?xml version="1.0" encoding="utf-8"?>
+<p:sld xmlns:a="http://schemas.openxmlformats.org/drawingml/2006/main" xmlns:r="http://schemas.openxmlformats.org/officeDocument/2006/relationships" xmlns:p="http://schemas.openxmlformats.org/presentationml/2006/main">
+  <p:cSld>
+    <p:spTree>
+      <p:nvGrpSpPr>
+        <p:cNvPr id="1" name=""/>
+        <p:cNvGrpSpPr/>
+        <p:nvPr/>
+      </p:nvGrpSpPr>
+      <p:grpSpPr>
+        <a:xfrm>
+          <a:off x="0" y="0"/>
+          <a:ext cx="0" cy="0"/>
+          <a:chOff x="0" y="0"/>
+          <a:chExt cx="0" cy="0"/>
+        </a:xfrm>
+      </p:grpSpPr>
+      <p:sp>
+        <p:nvSpPr>
+          <p:cNvPr id="2" name="Title 1"/>
+          <p:cNvSpPr>
+            <a:spLocks noGrp="1"/>
+          </p:cNvSpPr>
+          <p:nvPr>
+            <p:ph type="title"/>
+          </p:nvPr>
+        </p:nvSpPr>
+        <p:spPr/>
+        <p:txBody>
+          <a:bodyPr>
+            <a:normAutofit/>
+          </a:bodyPr>
+          <a:lstStyle/>
+          <a:p>
+            <a:r>
+              <a:rPr lang="en-CA" sz="3200" dirty="0" smtClean="0"/>
               <a:t>conclusion</a:t>
             </a:r>
             <a:endParaRPr lang="en-CA" sz="3200" dirty="0"/>
@@ -4293,7 +4471,7 @@
 </p:sld>
 </file>
 
-<file path=ppt/slides/slide15.xml><?xml version="1.0" encoding="utf-8"?>
+<file path=ppt/slides/slide16.xml><?xml version="1.0" encoding="utf-8"?>
 <p:sld xmlns:a="http://schemas.openxmlformats.org/drawingml/2006/main" xmlns:r="http://schemas.openxmlformats.org/officeDocument/2006/relationships" xmlns:p="http://schemas.openxmlformats.org/presentationml/2006/main">
   <p:cSld>
     <p:spTree>
@@ -4705,7 +4883,23 @@
             </a:r>
             <a:r>
               <a:rPr lang="en-US" dirty="0"/>
-              <a:t>→ Good customer</a:t>
+              <a:t>→ Good </a:t>
+            </a:r>
+            <a:r>
+              <a:rPr lang="en-US" dirty="0" smtClean="0"/>
+              <a:t>customer</a:t>
+            </a:r>
+            <a:r>
+              <a:rPr lang="en-US" dirty="0"/>
+              <a:t> </a:t>
+            </a:r>
+            <a:r>
+              <a:rPr lang="en-US" dirty="0" smtClean="0"/>
+              <a:t>- </a:t>
+            </a:r>
+            <a:r>
+              <a:rPr lang="en-US" dirty="0" smtClean="0"/>
+              <a:t>32166 </a:t>
             </a:r>
           </a:p>
           <a:p>
@@ -4713,13 +4907,27 @@
               <a:buNone/>
             </a:pPr>
             <a:r>
+              <a:rPr lang="en-US" dirty="0"/>
+              <a:t> </a:t>
+            </a:r>
+            <a:r>
               <a:rPr lang="en-US" dirty="0" smtClean="0"/>
-              <a:t>       0 </a:t>
+              <a:t>      0 </a:t>
             </a:r>
             <a:r>
               <a:rPr lang="en-US" dirty="0"/>
-              <a:t>→ Bad customer</a:t>
-            </a:r>
+              <a:t>→ Bad </a:t>
+            </a:r>
+            <a:r>
+              <a:rPr lang="en-US" dirty="0" smtClean="0"/>
+              <a:t>customer- 4291</a:t>
+            </a:r>
+            <a:endParaRPr lang="en-US" dirty="0"/>
+          </a:p>
+          <a:p>
+            <a:pPr marL="0" indent="0">
+              <a:buNone/>
+            </a:pPr>
             <a:endParaRPr lang="en-CA" dirty="0"/>
           </a:p>
         </p:txBody>
@@ -5242,61 +5450,71 @@
         </p:nvSpPr>
         <p:spPr/>
         <p:txBody>
-          <a:bodyPr>
-            <a:normAutofit/>
-          </a:bodyPr>
-          <a:lstStyle/>
-          <a:p>
-            <a:r>
-              <a:rPr lang="en-CA" sz="3200" dirty="0" smtClean="0"/>
-              <a:t>BEST MODEL</a:t>
-            </a:r>
-            <a:endParaRPr lang="en-CA" sz="3200" dirty="0"/>
-          </a:p>
-        </p:txBody>
-      </p:sp>
-      <p:sp>
-        <p:nvSpPr>
-          <p:cNvPr id="3" name="Content Placeholder 2"/>
-          <p:cNvSpPr>
-            <a:spLocks noGrp="1"/>
-          </p:cNvSpPr>
-          <p:nvPr>
-            <p:ph idx="1"/>
-          </p:nvPr>
-        </p:nvSpPr>
-        <p:spPr/>
-        <p:txBody>
           <a:bodyPr/>
           <a:lstStyle/>
           <a:p>
-            <a:pPr marL="0" indent="0">
-              <a:buNone/>
-            </a:pPr>
-            <a:r>
-              <a:rPr lang="en-US" b="1" dirty="0"/>
-              <a:t>Gradient Boosting Classifier</a:t>
-            </a:r>
-          </a:p>
-          <a:p>
-            <a:endParaRPr lang="en-US" dirty="0"/>
+            <a:r>
+              <a:rPr lang="en-CA" dirty="0"/>
+              <a:t>Hyper parameter tuning</a:t>
+            </a:r>
+          </a:p>
+        </p:txBody>
+      </p:sp>
+      <p:sp>
+        <p:nvSpPr>
+          <p:cNvPr id="3" name="Content Placeholder 2"/>
+          <p:cNvSpPr>
+            <a:spLocks noGrp="1"/>
+          </p:cNvSpPr>
+          <p:nvPr>
+            <p:ph idx="1"/>
+          </p:nvPr>
+        </p:nvSpPr>
+        <p:spPr/>
+        <p:txBody>
+          <a:bodyPr/>
+          <a:lstStyle/>
+          <a:p>
+            <a:r>
+              <a:rPr lang="en-CA" dirty="0" smtClean="0"/>
+              <a:t>Used Random Search CV</a:t>
+            </a:r>
+          </a:p>
+          <a:p>
+            <a:r>
+              <a:rPr lang="en-CA" dirty="0" smtClean="0"/>
+              <a:t>Best </a:t>
+            </a:r>
+            <a:r>
+              <a:rPr lang="en-CA" dirty="0"/>
+              <a:t>GB CV F1-macro: </a:t>
+            </a:r>
+            <a:r>
+              <a:rPr lang="en-CA" dirty="0" smtClean="0"/>
+              <a:t>0.8316132963009505</a:t>
+            </a:r>
           </a:p>
           <a:p>
             <a:r>
               <a:rPr lang="en-US" dirty="0"/>
-              <a:t>Best balance between majority and minority classes</a:t>
-            </a:r>
+              <a:t>Best F1-macro on test set: 0.479092446126925</a:t>
+            </a:r>
+            <a:endParaRPr lang="en-CA" dirty="0" smtClean="0"/>
           </a:p>
           <a:p>
             <a:r>
               <a:rPr lang="en-US" dirty="0"/>
-              <a:t>Strong generalization on test data</a:t>
+              <a:t>Best RF CV F1-macro: </a:t>
+            </a:r>
+            <a:r>
+              <a:rPr lang="en-US" dirty="0" smtClean="0"/>
+              <a:t>0.7830794026439081</a:t>
             </a:r>
           </a:p>
           <a:p>
             <a:r>
               <a:rPr lang="en-US" dirty="0"/>
-              <a:t>Stable cross-validation performance</a:t>
+              <a:t>Best F1-macro on test set: 0.44028920468711047</a:t>
             </a:r>
             <a:endParaRPr lang="en-CA" dirty="0"/>
           </a:p>
@@ -5305,20 +5523,13 @@
     </p:spTree>
     <p:extLst>
       <p:ext uri="{BB962C8B-B14F-4D97-AF65-F5344CB8AC3E}">
-        <p14:creationId xmlns:p14="http://schemas.microsoft.com/office/powerpoint/2010/main" val="1776460486"/>
+        <p14:creationId xmlns:p14="http://schemas.microsoft.com/office/powerpoint/2010/main" val="26935641"/>
       </p:ext>
     </p:extLst>
   </p:cSld>
   <p:clrMapOvr>
     <a:masterClrMapping/>
   </p:clrMapOvr>
-  <p:timing>
-    <p:tnLst>
-      <p:par>
-        <p:cTn id="1" dur="indefinite" restart="never" nodeType="tmRoot"/>
-      </p:par>
-    </p:tnLst>
-  </p:timing>
 </p:sld>
 </file>
 
